--- a/バランスボール（仮）.pptx
+++ b/バランスボール（仮）.pptx
@@ -247,7 +247,7 @@
           <a:p>
             <a:fld id="{8AB604FC-2B28-4B49-8FF9-87007E37712A}" type="datetimeFigureOut">
               <a:rPr kumimoji="1" lang="ja-JP" altLang="en-US" smtClean="0"/>
-              <a:t>2026/4/13</a:t>
+              <a:t>2026/4/15</a:t>
             </a:fld>
             <a:endParaRPr kumimoji="1" lang="ja-JP" altLang="en-US"/>
           </a:p>
@@ -449,7 +449,7 @@
           <a:p>
             <a:fld id="{8AB604FC-2B28-4B49-8FF9-87007E37712A}" type="datetimeFigureOut">
               <a:rPr kumimoji="1" lang="ja-JP" altLang="en-US" smtClean="0"/>
-              <a:t>2026/4/13</a:t>
+              <a:t>2026/4/15</a:t>
             </a:fld>
             <a:endParaRPr kumimoji="1" lang="ja-JP" altLang="en-US"/>
           </a:p>
@@ -661,7 +661,7 @@
           <a:p>
             <a:fld id="{8AB604FC-2B28-4B49-8FF9-87007E37712A}" type="datetimeFigureOut">
               <a:rPr kumimoji="1" lang="ja-JP" altLang="en-US" smtClean="0"/>
-              <a:t>2026/4/13</a:t>
+              <a:t>2026/4/15</a:t>
             </a:fld>
             <a:endParaRPr kumimoji="1" lang="ja-JP" altLang="en-US"/>
           </a:p>
@@ -863,7 +863,7 @@
           <a:p>
             <a:fld id="{8AB604FC-2B28-4B49-8FF9-87007E37712A}" type="datetimeFigureOut">
               <a:rPr kumimoji="1" lang="ja-JP" altLang="en-US" smtClean="0"/>
-              <a:t>2026/4/13</a:t>
+              <a:t>2026/4/15</a:t>
             </a:fld>
             <a:endParaRPr kumimoji="1" lang="ja-JP" altLang="en-US"/>
           </a:p>
@@ -1109,7 +1109,7 @@
           <a:p>
             <a:fld id="{8AB604FC-2B28-4B49-8FF9-87007E37712A}" type="datetimeFigureOut">
               <a:rPr kumimoji="1" lang="ja-JP" altLang="en-US" smtClean="0"/>
-              <a:t>2026/4/13</a:t>
+              <a:t>2026/4/15</a:t>
             </a:fld>
             <a:endParaRPr kumimoji="1" lang="ja-JP" altLang="en-US"/>
           </a:p>
@@ -1405,7 +1405,7 @@
           <a:p>
             <a:fld id="{8AB604FC-2B28-4B49-8FF9-87007E37712A}" type="datetimeFigureOut">
               <a:rPr kumimoji="1" lang="ja-JP" altLang="en-US" smtClean="0"/>
-              <a:t>2026/4/13</a:t>
+              <a:t>2026/4/15</a:t>
             </a:fld>
             <a:endParaRPr kumimoji="1" lang="ja-JP" altLang="en-US"/>
           </a:p>
@@ -1836,7 +1836,7 @@
           <a:p>
             <a:fld id="{8AB604FC-2B28-4B49-8FF9-87007E37712A}" type="datetimeFigureOut">
               <a:rPr kumimoji="1" lang="ja-JP" altLang="en-US" smtClean="0"/>
-              <a:t>2026/4/13</a:t>
+              <a:t>2026/4/15</a:t>
             </a:fld>
             <a:endParaRPr kumimoji="1" lang="ja-JP" altLang="en-US"/>
           </a:p>
@@ -1954,7 +1954,7 @@
           <a:p>
             <a:fld id="{8AB604FC-2B28-4B49-8FF9-87007E37712A}" type="datetimeFigureOut">
               <a:rPr kumimoji="1" lang="ja-JP" altLang="en-US" smtClean="0"/>
-              <a:t>2026/4/13</a:t>
+              <a:t>2026/4/15</a:t>
             </a:fld>
             <a:endParaRPr kumimoji="1" lang="ja-JP" altLang="en-US"/>
           </a:p>
@@ -2049,7 +2049,7 @@
           <a:p>
             <a:fld id="{8AB604FC-2B28-4B49-8FF9-87007E37712A}" type="datetimeFigureOut">
               <a:rPr kumimoji="1" lang="ja-JP" altLang="en-US" smtClean="0"/>
-              <a:t>2026/4/13</a:t>
+              <a:t>2026/4/15</a:t>
             </a:fld>
             <a:endParaRPr kumimoji="1" lang="ja-JP" altLang="en-US"/>
           </a:p>
@@ -2358,7 +2358,7 @@
           <a:p>
             <a:fld id="{8AB604FC-2B28-4B49-8FF9-87007E37712A}" type="datetimeFigureOut">
               <a:rPr kumimoji="1" lang="ja-JP" altLang="en-US" smtClean="0"/>
-              <a:t>2026/4/13</a:t>
+              <a:t>2026/4/15</a:t>
             </a:fld>
             <a:endParaRPr kumimoji="1" lang="ja-JP" altLang="en-US"/>
           </a:p>
@@ -2611,7 +2611,7 @@
           <a:p>
             <a:fld id="{8AB604FC-2B28-4B49-8FF9-87007E37712A}" type="datetimeFigureOut">
               <a:rPr kumimoji="1" lang="ja-JP" altLang="en-US" smtClean="0"/>
-              <a:t>2026/4/13</a:t>
+              <a:t>2026/4/15</a:t>
             </a:fld>
             <a:endParaRPr kumimoji="1" lang="ja-JP" altLang="en-US"/>
           </a:p>
@@ -2856,7 +2856,7 @@
           <a:p>
             <a:fld id="{8AB604FC-2B28-4B49-8FF9-87007E37712A}" type="datetimeFigureOut">
               <a:rPr kumimoji="1" lang="ja-JP" altLang="en-US" smtClean="0"/>
-              <a:t>2026/4/13</a:t>
+              <a:t>2026/4/15</a:t>
             </a:fld>
             <a:endParaRPr kumimoji="1" lang="ja-JP" altLang="en-US"/>
           </a:p>
@@ -3277,8 +3277,8 @@
           <a:lstStyle/>
           <a:p>
             <a:r>
-              <a:rPr lang="ja-JP" altLang="en-US" dirty="0" smtClean="0"/>
-              <a:t>バランスボール（仮）</a:t>
+              <a:rPr kumimoji="1" lang="ja-JP" altLang="en-US" dirty="0" smtClean="0"/>
+              <a:t>ボールパズル</a:t>
             </a:r>
             <a:endParaRPr kumimoji="1" lang="ja-JP" altLang="en-US" dirty="0"/>
           </a:p>

--- a/バランスボール（仮）.pptx
+++ b/バランスボール（仮）.pptx
@@ -247,7 +247,7 @@
           <a:p>
             <a:fld id="{8AB604FC-2B28-4B49-8FF9-87007E37712A}" type="datetimeFigureOut">
               <a:rPr kumimoji="1" lang="ja-JP" altLang="en-US" smtClean="0"/>
-              <a:t>2026/4/15</a:t>
+              <a:t>2026/4/17</a:t>
             </a:fld>
             <a:endParaRPr kumimoji="1" lang="ja-JP" altLang="en-US"/>
           </a:p>
@@ -449,7 +449,7 @@
           <a:p>
             <a:fld id="{8AB604FC-2B28-4B49-8FF9-87007E37712A}" type="datetimeFigureOut">
               <a:rPr kumimoji="1" lang="ja-JP" altLang="en-US" smtClean="0"/>
-              <a:t>2026/4/15</a:t>
+              <a:t>2026/4/17</a:t>
             </a:fld>
             <a:endParaRPr kumimoji="1" lang="ja-JP" altLang="en-US"/>
           </a:p>
@@ -661,7 +661,7 @@
           <a:p>
             <a:fld id="{8AB604FC-2B28-4B49-8FF9-87007E37712A}" type="datetimeFigureOut">
               <a:rPr kumimoji="1" lang="ja-JP" altLang="en-US" smtClean="0"/>
-              <a:t>2026/4/15</a:t>
+              <a:t>2026/4/17</a:t>
             </a:fld>
             <a:endParaRPr kumimoji="1" lang="ja-JP" altLang="en-US"/>
           </a:p>
@@ -863,7 +863,7 @@
           <a:p>
             <a:fld id="{8AB604FC-2B28-4B49-8FF9-87007E37712A}" type="datetimeFigureOut">
               <a:rPr kumimoji="1" lang="ja-JP" altLang="en-US" smtClean="0"/>
-              <a:t>2026/4/15</a:t>
+              <a:t>2026/4/17</a:t>
             </a:fld>
             <a:endParaRPr kumimoji="1" lang="ja-JP" altLang="en-US"/>
           </a:p>
@@ -1109,7 +1109,7 @@
           <a:p>
             <a:fld id="{8AB604FC-2B28-4B49-8FF9-87007E37712A}" type="datetimeFigureOut">
               <a:rPr kumimoji="1" lang="ja-JP" altLang="en-US" smtClean="0"/>
-              <a:t>2026/4/15</a:t>
+              <a:t>2026/4/17</a:t>
             </a:fld>
             <a:endParaRPr kumimoji="1" lang="ja-JP" altLang="en-US"/>
           </a:p>
@@ -1405,7 +1405,7 @@
           <a:p>
             <a:fld id="{8AB604FC-2B28-4B49-8FF9-87007E37712A}" type="datetimeFigureOut">
               <a:rPr kumimoji="1" lang="ja-JP" altLang="en-US" smtClean="0"/>
-              <a:t>2026/4/15</a:t>
+              <a:t>2026/4/17</a:t>
             </a:fld>
             <a:endParaRPr kumimoji="1" lang="ja-JP" altLang="en-US"/>
           </a:p>
@@ -1836,7 +1836,7 @@
           <a:p>
             <a:fld id="{8AB604FC-2B28-4B49-8FF9-87007E37712A}" type="datetimeFigureOut">
               <a:rPr kumimoji="1" lang="ja-JP" altLang="en-US" smtClean="0"/>
-              <a:t>2026/4/15</a:t>
+              <a:t>2026/4/17</a:t>
             </a:fld>
             <a:endParaRPr kumimoji="1" lang="ja-JP" altLang="en-US"/>
           </a:p>
@@ -1954,7 +1954,7 @@
           <a:p>
             <a:fld id="{8AB604FC-2B28-4B49-8FF9-87007E37712A}" type="datetimeFigureOut">
               <a:rPr kumimoji="1" lang="ja-JP" altLang="en-US" smtClean="0"/>
-              <a:t>2026/4/15</a:t>
+              <a:t>2026/4/17</a:t>
             </a:fld>
             <a:endParaRPr kumimoji="1" lang="ja-JP" altLang="en-US"/>
           </a:p>
@@ -2049,7 +2049,7 @@
           <a:p>
             <a:fld id="{8AB604FC-2B28-4B49-8FF9-87007E37712A}" type="datetimeFigureOut">
               <a:rPr kumimoji="1" lang="ja-JP" altLang="en-US" smtClean="0"/>
-              <a:t>2026/4/15</a:t>
+              <a:t>2026/4/17</a:t>
             </a:fld>
             <a:endParaRPr kumimoji="1" lang="ja-JP" altLang="en-US"/>
           </a:p>
@@ -2358,7 +2358,7 @@
           <a:p>
             <a:fld id="{8AB604FC-2B28-4B49-8FF9-87007E37712A}" type="datetimeFigureOut">
               <a:rPr kumimoji="1" lang="ja-JP" altLang="en-US" smtClean="0"/>
-              <a:t>2026/4/15</a:t>
+              <a:t>2026/4/17</a:t>
             </a:fld>
             <a:endParaRPr kumimoji="1" lang="ja-JP" altLang="en-US"/>
           </a:p>
@@ -2611,7 +2611,7 @@
           <a:p>
             <a:fld id="{8AB604FC-2B28-4B49-8FF9-87007E37712A}" type="datetimeFigureOut">
               <a:rPr kumimoji="1" lang="ja-JP" altLang="en-US" smtClean="0"/>
-              <a:t>2026/4/15</a:t>
+              <a:t>2026/4/17</a:t>
             </a:fld>
             <a:endParaRPr kumimoji="1" lang="ja-JP" altLang="en-US"/>
           </a:p>
@@ -2856,7 +2856,7 @@
           <a:p>
             <a:fld id="{8AB604FC-2B28-4B49-8FF9-87007E37712A}" type="datetimeFigureOut">
               <a:rPr kumimoji="1" lang="ja-JP" altLang="en-US" smtClean="0"/>
-              <a:t>2026/4/15</a:t>
+              <a:t>2026/4/17</a:t>
             </a:fld>
             <a:endParaRPr kumimoji="1" lang="ja-JP" altLang="en-US"/>
           </a:p>
@@ -4491,15 +4491,7 @@
             </a:r>
             <a:r>
               <a:rPr kumimoji="1" lang="ja-JP" altLang="en-US" sz="4000" dirty="0" smtClean="0"/>
-              <a:t>型 </a:t>
-            </a:r>
-            <a:r>
-              <a:rPr kumimoji="1" lang="en-US" altLang="ja-JP" sz="4000" dirty="0" smtClean="0"/>
-              <a:t>or </a:t>
-            </a:r>
-            <a:r>
-              <a:rPr kumimoji="1" lang="ja-JP" altLang="en-US" sz="4000" dirty="0" smtClean="0"/>
-              <a:t>広いステージ</a:t>
+              <a:t>型</a:t>
             </a:r>
             <a:endParaRPr kumimoji="1" lang="ja-JP" altLang="en-US" sz="4000" dirty="0"/>
           </a:p>
@@ -4528,8 +4520,8 @@
         </p:blipFill>
         <p:spPr bwMode="auto">
           <a:xfrm>
-            <a:off x="69850" y="2320144"/>
-            <a:ext cx="4858877" cy="3640919"/>
+            <a:off x="2452323" y="1405744"/>
+            <a:ext cx="6565842" cy="4920005"/>
           </a:xfrm>
           <a:prstGeom prst="rect">
             <a:avLst/>
@@ -4546,77 +4538,6 @@
           </a:extLst>
         </p:spPr>
       </p:pic>
-      <p:pic>
-        <p:nvPicPr>
-          <p:cNvPr id="1028" name="Picture 4" descr="【MMDステージ配布あり】入库_黒相集 ver1.0 / 椛暗 さんのイラスト - ニコニコ静画 (イラスト)"/>
-          <p:cNvPicPr>
-            <a:picLocks noChangeAspect="1" noChangeArrowheads="1"/>
-          </p:cNvPicPr>
-          <p:nvPr/>
-        </p:nvPicPr>
-        <p:blipFill>
-          <a:blip r:embed="rId3">
-            <a:extLst>
-              <a:ext uri="{28A0092B-C50C-407E-A947-70E740481C1C}">
-                <a14:useLocalDpi xmlns:a14="http://schemas.microsoft.com/office/drawing/2010/main" val="0"/>
-              </a:ext>
-            </a:extLst>
-          </a:blip>
-          <a:srcRect/>
-          <a:stretch>
-            <a:fillRect/>
-          </a:stretch>
-        </p:blipFill>
-        <p:spPr bwMode="auto">
-          <a:xfrm>
-            <a:off x="6175375" y="2320144"/>
-            <a:ext cx="5788025" cy="3258098"/>
-          </a:xfrm>
-          <a:prstGeom prst="rect">
-            <a:avLst/>
-          </a:prstGeom>
-          <a:noFill/>
-          <a:extLst>
-            <a:ext uri="{909E8E84-426E-40DD-AFC4-6F175D3DCCD1}">
-              <a14:hiddenFill xmlns:a14="http://schemas.microsoft.com/office/drawing/2010/main">
-                <a:solidFill>
-                  <a:srgbClr val="FFFFFF"/>
-                </a:solidFill>
-              </a14:hiddenFill>
-            </a:ext>
-          </a:extLst>
-        </p:spPr>
-      </p:pic>
-      <p:sp>
-        <p:nvSpPr>
-          <p:cNvPr id="3" name="テキスト ボックス 2"/>
-          <p:cNvSpPr txBox="1"/>
-          <p:nvPr/>
-        </p:nvSpPr>
-        <p:spPr>
-          <a:xfrm>
-            <a:off x="4928727" y="3395195"/>
-            <a:ext cx="1762125" cy="1107996"/>
-          </a:xfrm>
-          <a:prstGeom prst="rect">
-            <a:avLst/>
-          </a:prstGeom>
-          <a:noFill/>
-        </p:spPr>
-        <p:txBody>
-          <a:bodyPr wrap="square" rtlCol="0">
-            <a:spAutoFit/>
-          </a:bodyPr>
-          <a:lstStyle/>
-          <a:p>
-            <a:r>
-              <a:rPr lang="en-US" altLang="ja-JP" sz="6600" dirty="0" smtClean="0"/>
-              <a:t>or</a:t>
-            </a:r>
-            <a:endParaRPr kumimoji="1" lang="en-US" altLang="ja-JP" sz="6600" dirty="0" smtClean="0"/>
-          </a:p>
-        </p:txBody>
-      </p:sp>
       <p:sp>
         <p:nvSpPr>
           <p:cNvPr id="6" name="楕円 5"/>
@@ -4625,51 +4546,8 @@
         </p:nvSpPr>
         <p:spPr>
           <a:xfrm>
-            <a:off x="2199250" y="2701256"/>
+            <a:off x="5232400" y="2718034"/>
             <a:ext cx="600075" cy="568728"/>
-          </a:xfrm>
-          <a:prstGeom prst="ellipse">
-            <a:avLst/>
-          </a:prstGeom>
-          <a:solidFill>
-            <a:srgbClr val="00B050"/>
-          </a:solidFill>
-        </p:spPr>
-        <p:style>
-          <a:lnRef idx="2">
-            <a:schemeClr val="accent1">
-              <a:shade val="50000"/>
-            </a:schemeClr>
-          </a:lnRef>
-          <a:fillRef idx="1">
-            <a:schemeClr val="accent1"/>
-          </a:fillRef>
-          <a:effectRef idx="0">
-            <a:schemeClr val="accent1"/>
-          </a:effectRef>
-          <a:fontRef idx="minor">
-            <a:schemeClr val="lt1"/>
-          </a:fontRef>
-        </p:style>
-        <p:txBody>
-          <a:bodyPr rtlCol="0" anchor="ctr"/>
-          <a:lstStyle/>
-          <a:p>
-            <a:pPr algn="ctr"/>
-            <a:endParaRPr kumimoji="1" lang="ja-JP" altLang="en-US"/>
-          </a:p>
-        </p:txBody>
-      </p:sp>
-      <p:sp>
-        <p:nvSpPr>
-          <p:cNvPr id="7" name="楕円 6"/>
-          <p:cNvSpPr/>
-          <p:nvPr/>
-        </p:nvSpPr>
-        <p:spPr>
-          <a:xfrm>
-            <a:off x="8607424" y="5860175"/>
-            <a:ext cx="923925" cy="885825"/>
           </a:xfrm>
           <a:prstGeom prst="ellipse">
             <a:avLst/>
@@ -4739,7 +4617,7 @@
                                     <p:cond delay="0"/>
                                   </p:stCondLst>
                                   <p:childTnLst>
-                                    <p:animMotion origin="layout" path="M 0 0 C 0.069 0 0.125 0.056 0.125 0.125 C 0.125 0.194 0.069 0.25 0 0.25 C -0.069 0.25 -0.125 0.194 -0.125 0.125 C -0.125 0.056 -0.069 0 0 0 Z" pathEditMode="relative" ptsTypes="">
+                                    <p:animMotion origin="layout" path="M 3.95833E-6 -1.48148E-6 C 0.06901 -1.48148E-6 0.125 0.05602 0.125 0.125 C 0.125 0.19398 0.06901 0.25 3.95833E-6 0.25 C -0.06901 0.25 -0.125 0.19398 -0.125 0.125 C -0.125 0.05602 -0.06901 -1.48148E-6 3.95833E-6 -1.48148E-6 Z " pathEditMode="relative" rAng="0" ptsTypes="AAAAA">
                                       <p:cBhvr>
                                         <p:cTn id="6" dur="2000" fill="hold"/>
                                         <p:tgtEl>
@@ -4750,45 +4628,7 @@
                                           <p:attrName>ppt_y</p:attrName>
                                         </p:attrNameLst>
                                       </p:cBhvr>
-                                    </p:animMotion>
-                                  </p:childTnLst>
-                                </p:cTn>
-                              </p:par>
-                            </p:childTnLst>
-                          </p:cTn>
-                        </p:par>
-                      </p:childTnLst>
-                    </p:cTn>
-                  </p:par>
-                  <p:par>
-                    <p:cTn id="7" fill="hold">
-                      <p:stCondLst>
-                        <p:cond delay="indefinite"/>
-                      </p:stCondLst>
-                      <p:childTnLst>
-                        <p:par>
-                          <p:cTn id="8" fill="hold">
-                            <p:stCondLst>
-                              <p:cond delay="0"/>
-                            </p:stCondLst>
-                            <p:childTnLst>
-                              <p:par>
-                                <p:cTn id="9" presetID="64" presetClass="path" presetSubtype="0" accel="50000" decel="50000" fill="hold" grpId="0" nodeType="clickEffect">
-                                  <p:stCondLst>
-                                    <p:cond delay="0"/>
-                                  </p:stCondLst>
-                                  <p:childTnLst>
-                                    <p:animMotion origin="layout" path="M 0 0 L 0 -0.25 E" pathEditMode="relative" ptsTypes="">
-                                      <p:cBhvr>
-                                        <p:cTn id="10" dur="2000" fill="hold"/>
-                                        <p:tgtEl>
-                                          <p:spTgt spid="7"/>
-                                        </p:tgtEl>
-                                        <p:attrNameLst>
-                                          <p:attrName>ppt_x</p:attrName>
-                                          <p:attrName>ppt_y</p:attrName>
-                                        </p:attrNameLst>
-                                      </p:cBhvr>
+                                      <p:rCtr x="0" y="12500"/>
                                     </p:animMotion>
                                   </p:childTnLst>
                                 </p:cTn>
@@ -4822,7 +4662,6 @@
     </p:tnLst>
     <p:bldLst>
       <p:bldP spid="6" grpId="0" animBg="1"/>
-      <p:bldP spid="7" grpId="0" animBg="1"/>
     </p:bldLst>
   </p:timing>
 </p:sld>
